--- a/Experimentation/CBL diagrams draft.pptx
+++ b/Experimentation/CBL diagrams draft.pptx
@@ -7,6 +7,7 @@
   <p:sldIdLst>
     <p:sldId id="256" r:id="rId2"/>
     <p:sldId id="257" r:id="rId3"/>
+    <p:sldId id="258" r:id="rId4"/>
   </p:sldIdLst>
   <p:sldSz cx="12192000" cy="6858000"/>
   <p:notesSz cx="6858000" cy="9144000"/>
@@ -105,6 +106,11 @@
       </a:defRPr>
     </a:lvl9pPr>
   </p:defaultTextStyle>
+  <p:extLst>
+    <p:ext uri="{EFAFB233-063F-42B5-8137-9DF3F51BA10A}">
+      <p15:sldGuideLst xmlns:p15="http://schemas.microsoft.com/office/powerpoint/2012/main"/>
+    </p:ext>
+  </p:extLst>
 </p:presentation>
 </file>
 
@@ -257,7 +263,7 @@
           <a:p>
             <a:fld id="{A74723FF-5DF4-40BC-ADD2-6301C5422022}" type="datetimeFigureOut">
               <a:rPr lang="en-GB" smtClean="0"/>
-              <a:t>16/10/2025</a:t>
+              <a:t>20/10/2025</a:t>
             </a:fld>
             <a:endParaRPr lang="en-GB"/>
           </a:p>
@@ -457,7 +463,7 @@
           <a:p>
             <a:fld id="{A74723FF-5DF4-40BC-ADD2-6301C5422022}" type="datetimeFigureOut">
               <a:rPr lang="en-GB" smtClean="0"/>
-              <a:t>16/10/2025</a:t>
+              <a:t>20/10/2025</a:t>
             </a:fld>
             <a:endParaRPr lang="en-GB"/>
           </a:p>
@@ -667,7 +673,7 @@
           <a:p>
             <a:fld id="{A74723FF-5DF4-40BC-ADD2-6301C5422022}" type="datetimeFigureOut">
               <a:rPr lang="en-GB" smtClean="0"/>
-              <a:t>16/10/2025</a:t>
+              <a:t>20/10/2025</a:t>
             </a:fld>
             <a:endParaRPr lang="en-GB"/>
           </a:p>
@@ -867,7 +873,7 @@
           <a:p>
             <a:fld id="{A74723FF-5DF4-40BC-ADD2-6301C5422022}" type="datetimeFigureOut">
               <a:rPr lang="en-GB" smtClean="0"/>
-              <a:t>16/10/2025</a:t>
+              <a:t>20/10/2025</a:t>
             </a:fld>
             <a:endParaRPr lang="en-GB"/>
           </a:p>
@@ -1143,7 +1149,7 @@
           <a:p>
             <a:fld id="{A74723FF-5DF4-40BC-ADD2-6301C5422022}" type="datetimeFigureOut">
               <a:rPr lang="en-GB" smtClean="0"/>
-              <a:t>16/10/2025</a:t>
+              <a:t>20/10/2025</a:t>
             </a:fld>
             <a:endParaRPr lang="en-GB"/>
           </a:p>
@@ -1411,7 +1417,7 @@
           <a:p>
             <a:fld id="{A74723FF-5DF4-40BC-ADD2-6301C5422022}" type="datetimeFigureOut">
               <a:rPr lang="en-GB" smtClean="0"/>
-              <a:t>16/10/2025</a:t>
+              <a:t>20/10/2025</a:t>
             </a:fld>
             <a:endParaRPr lang="en-GB"/>
           </a:p>
@@ -1826,7 +1832,7 @@
           <a:p>
             <a:fld id="{A74723FF-5DF4-40BC-ADD2-6301C5422022}" type="datetimeFigureOut">
               <a:rPr lang="en-GB" smtClean="0"/>
-              <a:t>16/10/2025</a:t>
+              <a:t>20/10/2025</a:t>
             </a:fld>
             <a:endParaRPr lang="en-GB"/>
           </a:p>
@@ -1968,7 +1974,7 @@
           <a:p>
             <a:fld id="{A74723FF-5DF4-40BC-ADD2-6301C5422022}" type="datetimeFigureOut">
               <a:rPr lang="en-GB" smtClean="0"/>
-              <a:t>16/10/2025</a:t>
+              <a:t>20/10/2025</a:t>
             </a:fld>
             <a:endParaRPr lang="en-GB"/>
           </a:p>
@@ -2081,7 +2087,7 @@
           <a:p>
             <a:fld id="{A74723FF-5DF4-40BC-ADD2-6301C5422022}" type="datetimeFigureOut">
               <a:rPr lang="en-GB" smtClean="0"/>
-              <a:t>16/10/2025</a:t>
+              <a:t>20/10/2025</a:t>
             </a:fld>
             <a:endParaRPr lang="en-GB"/>
           </a:p>
@@ -2394,7 +2400,7 @@
           <a:p>
             <a:fld id="{A74723FF-5DF4-40BC-ADD2-6301C5422022}" type="datetimeFigureOut">
               <a:rPr lang="en-GB" smtClean="0"/>
-              <a:t>16/10/2025</a:t>
+              <a:t>20/10/2025</a:t>
             </a:fld>
             <a:endParaRPr lang="en-GB"/>
           </a:p>
@@ -2683,7 +2689,7 @@
           <a:p>
             <a:fld id="{A74723FF-5DF4-40BC-ADD2-6301C5422022}" type="datetimeFigureOut">
               <a:rPr lang="en-GB" smtClean="0"/>
-              <a:t>16/10/2025</a:t>
+              <a:t>20/10/2025</a:t>
             </a:fld>
             <a:endParaRPr lang="en-GB"/>
           </a:p>
@@ -2926,7 +2932,7 @@
           <a:p>
             <a:fld id="{A74723FF-5DF4-40BC-ADD2-6301C5422022}" type="datetimeFigureOut">
               <a:rPr lang="en-GB" smtClean="0"/>
-              <a:t>16/10/2025</a:t>
+              <a:t>20/10/2025</a:t>
             </a:fld>
             <a:endParaRPr lang="en-GB"/>
           </a:p>
@@ -4034,7 +4040,7 @@
           <a:prstGeom prst="straightConnector1">
             <a:avLst/>
           </a:prstGeom>
-          <a:ln w="19050">
+          <a:ln w="19050" cap="flat">
             <a:solidFill>
               <a:schemeClr val="tx1"/>
             </a:solidFill>
@@ -4104,6 +4110,184 @@
           </a:fontRef>
         </p:style>
       </p:cxnSp>
+      <p:sp>
+        <p:nvSpPr>
+          <p:cNvPr id="2" name="Arrow: Up 1">
+            <a:extLst>
+              <a:ext uri="{FF2B5EF4-FFF2-40B4-BE49-F238E27FC236}">
+                <a16:creationId xmlns:a16="http://schemas.microsoft.com/office/drawing/2014/main" id="{627F229A-7484-61BC-FAEC-64616E26A1F8}"/>
+              </a:ext>
+            </a:extLst>
+          </p:cNvPr>
+          <p:cNvSpPr/>
+          <p:nvPr/>
+        </p:nvSpPr>
+        <p:spPr>
+          <a:xfrm>
+            <a:off x="7500323" y="4151501"/>
+            <a:ext cx="430283" cy="2159778"/>
+          </a:xfrm>
+          <a:prstGeom prst="upArrow">
+            <a:avLst>
+              <a:gd name="adj1" fmla="val 0"/>
+              <a:gd name="adj2" fmla="val 74771"/>
+            </a:avLst>
+          </a:prstGeom>
+          <a:solidFill>
+            <a:schemeClr val="bg1"/>
+          </a:solidFill>
+          <a:ln w="19050">
+            <a:solidFill>
+              <a:schemeClr val="tx1"/>
+            </a:solidFill>
+          </a:ln>
+        </p:spPr>
+        <p:style>
+          <a:lnRef idx="2">
+            <a:schemeClr val="accent1">
+              <a:shade val="15000"/>
+            </a:schemeClr>
+          </a:lnRef>
+          <a:fillRef idx="1">
+            <a:schemeClr val="accent1"/>
+          </a:fillRef>
+          <a:effectRef idx="0">
+            <a:schemeClr val="accent1"/>
+          </a:effectRef>
+          <a:fontRef idx="minor">
+            <a:schemeClr val="lt1"/>
+          </a:fontRef>
+        </p:style>
+        <p:txBody>
+          <a:bodyPr rtlCol="0" anchor="ctr"/>
+          <a:lstStyle/>
+          <a:p>
+            <a:pPr algn="ctr"/>
+            <a:endParaRPr lang="en-GB"/>
+          </a:p>
+        </p:txBody>
+      </p:sp>
+      <p:grpSp>
+        <p:nvGrpSpPr>
+          <p:cNvPr id="16" name="Group 15">
+            <a:extLst>
+              <a:ext uri="{FF2B5EF4-FFF2-40B4-BE49-F238E27FC236}">
+                <a16:creationId xmlns:a16="http://schemas.microsoft.com/office/drawing/2014/main" id="{1281209D-2B48-6358-3D15-2A04B8EBC6D4}"/>
+              </a:ext>
+            </a:extLst>
+          </p:cNvPr>
+          <p:cNvGrpSpPr/>
+          <p:nvPr/>
+        </p:nvGrpSpPr>
+        <p:grpSpPr>
+          <a:xfrm>
+            <a:off x="8167892" y="3066807"/>
+            <a:ext cx="2367342" cy="239004"/>
+            <a:chOff x="8167892" y="3066807"/>
+            <a:chExt cx="2367342" cy="239004"/>
+          </a:xfrm>
+        </p:grpSpPr>
+        <p:cxnSp>
+          <p:nvCxnSpPr>
+            <p:cNvPr id="3" name="Straight Arrow Connector 2">
+              <a:extLst>
+                <a:ext uri="{FF2B5EF4-FFF2-40B4-BE49-F238E27FC236}">
+                  <a16:creationId xmlns:a16="http://schemas.microsoft.com/office/drawing/2014/main" id="{FB28E2D6-B87D-A9AE-6A71-191CE4C6428D}"/>
+                </a:ext>
+              </a:extLst>
+            </p:cNvPr>
+            <p:cNvCxnSpPr>
+              <a:cxnSpLocks/>
+              <a:stCxn id="5" idx="3"/>
+            </p:cNvCxnSpPr>
+            <p:nvPr/>
+          </p:nvCxnSpPr>
+          <p:spPr>
+            <a:xfrm>
+              <a:off x="8629676" y="3186309"/>
+              <a:ext cx="1905558" cy="0"/>
+            </a:xfrm>
+            <a:prstGeom prst="straightConnector1">
+              <a:avLst/>
+            </a:prstGeom>
+            <a:ln w="19050">
+              <a:solidFill>
+                <a:schemeClr val="tx1"/>
+              </a:solidFill>
+              <a:headEnd type="none" w="med" len="med"/>
+              <a:tailEnd type="arrow" w="lg" len="lg"/>
+            </a:ln>
+          </p:spPr>
+          <p:style>
+            <a:lnRef idx="2">
+              <a:schemeClr val="accent1"/>
+            </a:lnRef>
+            <a:fillRef idx="0">
+              <a:schemeClr val="accent1"/>
+            </a:fillRef>
+            <a:effectRef idx="1">
+              <a:schemeClr val="accent1"/>
+            </a:effectRef>
+            <a:fontRef idx="minor">
+              <a:schemeClr val="tx1"/>
+            </a:fontRef>
+          </p:style>
+        </p:cxnSp>
+        <p:sp>
+          <p:nvSpPr>
+            <p:cNvPr id="5" name="Diamond 4">
+              <a:extLst>
+                <a:ext uri="{FF2B5EF4-FFF2-40B4-BE49-F238E27FC236}">
+                  <a16:creationId xmlns:a16="http://schemas.microsoft.com/office/drawing/2014/main" id="{6CA5A2FB-A485-4878-7167-127585E6C2A1}"/>
+                </a:ext>
+              </a:extLst>
+            </p:cNvPr>
+            <p:cNvSpPr/>
+            <p:nvPr/>
+          </p:nvSpPr>
+          <p:spPr>
+            <a:xfrm>
+              <a:off x="8167892" y="3066807"/>
+              <a:ext cx="461784" cy="239004"/>
+            </a:xfrm>
+            <a:prstGeom prst="diamond">
+              <a:avLst/>
+            </a:prstGeom>
+            <a:solidFill>
+              <a:schemeClr val="bg1"/>
+            </a:solidFill>
+            <a:ln>
+              <a:solidFill>
+                <a:schemeClr val="tx1"/>
+              </a:solidFill>
+            </a:ln>
+          </p:spPr>
+          <p:style>
+            <a:lnRef idx="2">
+              <a:schemeClr val="accent1">
+                <a:shade val="15000"/>
+              </a:schemeClr>
+            </a:lnRef>
+            <a:fillRef idx="1">
+              <a:schemeClr val="accent1"/>
+            </a:fillRef>
+            <a:effectRef idx="0">
+              <a:schemeClr val="accent1"/>
+            </a:effectRef>
+            <a:fontRef idx="minor">
+              <a:schemeClr val="lt1"/>
+            </a:fontRef>
+          </p:style>
+          <p:txBody>
+            <a:bodyPr rtlCol="0" anchor="ctr"/>
+            <a:lstStyle/>
+            <a:p>
+              <a:pPr algn="ctr"/>
+              <a:endParaRPr lang="en-GB"/>
+            </a:p>
+          </p:txBody>
+        </p:sp>
+      </p:grpSp>
     </p:spTree>
     <p:extLst>
       <p:ext uri="{BB962C8B-B14F-4D97-AF65-F5344CB8AC3E}">
@@ -5578,6 +5762,36 @@
     <p:extLst>
       <p:ext uri="{BB962C8B-B14F-4D97-AF65-F5344CB8AC3E}">
         <p14:creationId xmlns:p14="http://schemas.microsoft.com/office/powerpoint/2010/main" val="2584032993"/>
+      </p:ext>
+    </p:extLst>
+  </p:cSld>
+  <p:clrMapOvr>
+    <a:masterClrMapping/>
+  </p:clrMapOvr>
+</p:sld>
+</file>
+
+<file path=ppt/slides/slide3.xml><?xml version="1.0" encoding="utf-8"?>
+<p:sld xmlns:a="http://schemas.openxmlformats.org/drawingml/2006/main" xmlns:r="http://schemas.openxmlformats.org/officeDocument/2006/relationships" xmlns:p="http://schemas.openxmlformats.org/presentationml/2006/main">
+  <p:cSld>
+    <p:spTree>
+      <p:nvGrpSpPr>
+        <p:cNvPr id="1" name=""/>
+        <p:cNvGrpSpPr/>
+        <p:nvPr/>
+      </p:nvGrpSpPr>
+      <p:grpSpPr>
+        <a:xfrm>
+          <a:off x="0" y="0"/>
+          <a:ext cx="0" cy="0"/>
+          <a:chOff x="0" y="0"/>
+          <a:chExt cx="0" cy="0"/>
+        </a:xfrm>
+      </p:grpSpPr>
+    </p:spTree>
+    <p:extLst>
+      <p:ext uri="{BB962C8B-B14F-4D97-AF65-F5344CB8AC3E}">
+        <p14:creationId xmlns:p14="http://schemas.microsoft.com/office/powerpoint/2010/main" val="4023040089"/>
       </p:ext>
     </p:extLst>
   </p:cSld>

--- a/Experimentation/CBL diagrams draft.pptx
+++ b/Experimentation/CBL diagrams draft.pptx
@@ -4288,6 +4288,291 @@
           </p:txBody>
         </p:sp>
       </p:grpSp>
+      <p:grpSp>
+        <p:nvGrpSpPr>
+          <p:cNvPr id="17" name="Group 16">
+            <a:extLst>
+              <a:ext uri="{FF2B5EF4-FFF2-40B4-BE49-F238E27FC236}">
+                <a16:creationId xmlns:a16="http://schemas.microsoft.com/office/drawing/2014/main" id="{062A5E53-622F-7B07-142F-A1D7EC80D32B}"/>
+              </a:ext>
+            </a:extLst>
+          </p:cNvPr>
+          <p:cNvGrpSpPr/>
+          <p:nvPr/>
+        </p:nvGrpSpPr>
+        <p:grpSpPr>
+          <a:xfrm>
+            <a:off x="8101509" y="2577267"/>
+            <a:ext cx="2367342" cy="239004"/>
+            <a:chOff x="8167892" y="3066807"/>
+            <a:chExt cx="2367342" cy="239004"/>
+          </a:xfrm>
+        </p:grpSpPr>
+        <p:cxnSp>
+          <p:nvCxnSpPr>
+            <p:cNvPr id="25" name="Straight Arrow Connector 24">
+              <a:extLst>
+                <a:ext uri="{FF2B5EF4-FFF2-40B4-BE49-F238E27FC236}">
+                  <a16:creationId xmlns:a16="http://schemas.microsoft.com/office/drawing/2014/main" id="{3278D13F-5489-4156-620D-249C7BBE3E40}"/>
+                </a:ext>
+              </a:extLst>
+            </p:cNvPr>
+            <p:cNvCxnSpPr>
+              <a:cxnSpLocks/>
+              <a:stCxn id="27" idx="3"/>
+            </p:cNvCxnSpPr>
+            <p:nvPr/>
+          </p:nvCxnSpPr>
+          <p:spPr>
+            <a:xfrm>
+              <a:off x="8629676" y="3186309"/>
+              <a:ext cx="1905558" cy="0"/>
+            </a:xfrm>
+            <a:prstGeom prst="straightConnector1">
+              <a:avLst/>
+            </a:prstGeom>
+            <a:ln w="19050">
+              <a:solidFill>
+                <a:schemeClr val="tx1"/>
+              </a:solidFill>
+              <a:headEnd type="none" w="med" len="med"/>
+              <a:tailEnd type="arrow" w="lg" len="lg"/>
+            </a:ln>
+          </p:spPr>
+          <p:style>
+            <a:lnRef idx="2">
+              <a:schemeClr val="accent1"/>
+            </a:lnRef>
+            <a:fillRef idx="0">
+              <a:schemeClr val="accent1"/>
+            </a:fillRef>
+            <a:effectRef idx="1">
+              <a:schemeClr val="accent1"/>
+            </a:effectRef>
+            <a:fontRef idx="minor">
+              <a:schemeClr val="tx1"/>
+            </a:fontRef>
+          </p:style>
+        </p:cxnSp>
+        <p:sp>
+          <p:nvSpPr>
+            <p:cNvPr id="27" name="Diamond 26">
+              <a:extLst>
+                <a:ext uri="{FF2B5EF4-FFF2-40B4-BE49-F238E27FC236}">
+                  <a16:creationId xmlns:a16="http://schemas.microsoft.com/office/drawing/2014/main" id="{A1CCCD29-0F30-53A8-EEC6-D1F2B12AC7F6}"/>
+                </a:ext>
+              </a:extLst>
+            </p:cNvPr>
+            <p:cNvSpPr/>
+            <p:nvPr/>
+          </p:nvSpPr>
+          <p:spPr>
+            <a:xfrm>
+              <a:off x="8167892" y="3066807"/>
+              <a:ext cx="461784" cy="239004"/>
+            </a:xfrm>
+            <a:prstGeom prst="diamond">
+              <a:avLst/>
+            </a:prstGeom>
+            <a:solidFill>
+              <a:schemeClr val="tx1"/>
+            </a:solidFill>
+            <a:ln>
+              <a:solidFill>
+                <a:schemeClr val="tx1"/>
+              </a:solidFill>
+            </a:ln>
+          </p:spPr>
+          <p:style>
+            <a:lnRef idx="2">
+              <a:schemeClr val="accent1">
+                <a:shade val="15000"/>
+              </a:schemeClr>
+            </a:lnRef>
+            <a:fillRef idx="1">
+              <a:schemeClr val="accent1"/>
+            </a:fillRef>
+            <a:effectRef idx="0">
+              <a:schemeClr val="accent1"/>
+            </a:effectRef>
+            <a:fontRef idx="minor">
+              <a:schemeClr val="lt1"/>
+            </a:fontRef>
+          </p:style>
+          <p:txBody>
+            <a:bodyPr rtlCol="0" anchor="ctr"/>
+            <a:lstStyle/>
+            <a:p>
+              <a:pPr algn="ctr"/>
+              <a:endParaRPr lang="en-GB"/>
+            </a:p>
+          </p:txBody>
+        </p:sp>
+      </p:grpSp>
+      <p:grpSp>
+        <p:nvGrpSpPr>
+          <p:cNvPr id="35" name="Group 34">
+            <a:extLst>
+              <a:ext uri="{FF2B5EF4-FFF2-40B4-BE49-F238E27FC236}">
+                <a16:creationId xmlns:a16="http://schemas.microsoft.com/office/drawing/2014/main" id="{396836CD-12E8-08C0-EFA1-32CA1FC09652}"/>
+              </a:ext>
+            </a:extLst>
+          </p:cNvPr>
+          <p:cNvGrpSpPr/>
+          <p:nvPr/>
+        </p:nvGrpSpPr>
+        <p:grpSpPr>
+          <a:xfrm>
+            <a:off x="8382064" y="4308105"/>
+            <a:ext cx="1098525" cy="128027"/>
+            <a:chOff x="8382064" y="4308105"/>
+            <a:chExt cx="1098525" cy="128027"/>
+          </a:xfrm>
+        </p:grpSpPr>
+        <p:sp>
+          <p:nvSpPr>
+            <p:cNvPr id="30" name="Oval 29">
+              <a:extLst>
+                <a:ext uri="{FF2B5EF4-FFF2-40B4-BE49-F238E27FC236}">
+                  <a16:creationId xmlns:a16="http://schemas.microsoft.com/office/drawing/2014/main" id="{965035EC-9482-A85D-DF46-9D4F2545C628}"/>
+                </a:ext>
+              </a:extLst>
+            </p:cNvPr>
+            <p:cNvSpPr/>
+            <p:nvPr/>
+          </p:nvSpPr>
+          <p:spPr>
+            <a:xfrm>
+              <a:off x="8382064" y="4308105"/>
+              <a:ext cx="128027" cy="128027"/>
+            </a:xfrm>
+            <a:prstGeom prst="ellipse">
+              <a:avLst/>
+            </a:prstGeom>
+            <a:noFill/>
+            <a:ln>
+              <a:solidFill>
+                <a:schemeClr val="tx1"/>
+              </a:solidFill>
+            </a:ln>
+          </p:spPr>
+          <p:style>
+            <a:lnRef idx="2">
+              <a:schemeClr val="accent1">
+                <a:shade val="15000"/>
+              </a:schemeClr>
+            </a:lnRef>
+            <a:fillRef idx="1">
+              <a:schemeClr val="accent1"/>
+            </a:fillRef>
+            <a:effectRef idx="0">
+              <a:schemeClr val="accent1"/>
+            </a:effectRef>
+            <a:fontRef idx="minor">
+              <a:schemeClr val="lt1"/>
+            </a:fontRef>
+          </p:style>
+          <p:txBody>
+            <a:bodyPr rtlCol="0" anchor="ctr"/>
+            <a:lstStyle/>
+            <a:p>
+              <a:pPr algn="ctr"/>
+              <a:endParaRPr lang="en-GB" dirty="0"/>
+            </a:p>
+          </p:txBody>
+        </p:sp>
+        <p:cxnSp>
+          <p:nvCxnSpPr>
+            <p:cNvPr id="32" name="Straight Connector 31">
+              <a:extLst>
+                <a:ext uri="{FF2B5EF4-FFF2-40B4-BE49-F238E27FC236}">
+                  <a16:creationId xmlns:a16="http://schemas.microsoft.com/office/drawing/2014/main" id="{B67FD68E-C4BB-1864-125A-C36C6B890788}"/>
+                </a:ext>
+              </a:extLst>
+            </p:cNvPr>
+            <p:cNvCxnSpPr>
+              <a:cxnSpLocks/>
+              <a:stCxn id="30" idx="6"/>
+            </p:cNvCxnSpPr>
+            <p:nvPr/>
+          </p:nvCxnSpPr>
+          <p:spPr>
+            <a:xfrm flipV="1">
+              <a:off x="8510091" y="4372118"/>
+              <a:ext cx="970498" cy="1"/>
+            </a:xfrm>
+            <a:prstGeom prst="line">
+              <a:avLst/>
+            </a:prstGeom>
+            <a:ln>
+              <a:solidFill>
+                <a:schemeClr val="tx1"/>
+              </a:solidFill>
+              <a:prstDash val="dash"/>
+            </a:ln>
+          </p:spPr>
+          <p:style>
+            <a:lnRef idx="2">
+              <a:schemeClr val="accent1"/>
+            </a:lnRef>
+            <a:fillRef idx="0">
+              <a:schemeClr val="accent1"/>
+            </a:fillRef>
+            <a:effectRef idx="1">
+              <a:schemeClr val="accent1"/>
+            </a:effectRef>
+            <a:fontRef idx="minor">
+              <a:schemeClr val="tx1"/>
+            </a:fontRef>
+          </p:style>
+        </p:cxnSp>
+      </p:grpSp>
+      <p:cxnSp>
+        <p:nvCxnSpPr>
+          <p:cNvPr id="41" name="Connector: Elbow 40">
+            <a:extLst>
+              <a:ext uri="{FF2B5EF4-FFF2-40B4-BE49-F238E27FC236}">
+                <a16:creationId xmlns:a16="http://schemas.microsoft.com/office/drawing/2014/main" id="{A13F21B5-E9A9-66B1-F575-C4E505C0E8EE}"/>
+              </a:ext>
+            </a:extLst>
+          </p:cNvPr>
+          <p:cNvCxnSpPr>
+            <a:cxnSpLocks/>
+          </p:cNvCxnSpPr>
+          <p:nvPr/>
+        </p:nvCxnSpPr>
+        <p:spPr>
+          <a:xfrm rot="10800000" flipH="1">
+            <a:off x="8750520" y="4761940"/>
+            <a:ext cx="927205" cy="768545"/>
+          </a:xfrm>
+          <a:prstGeom prst="bentConnector3">
+            <a:avLst>
+              <a:gd name="adj1" fmla="val -821"/>
+            </a:avLst>
+          </a:prstGeom>
+          <a:ln>
+            <a:solidFill>
+              <a:schemeClr val="tx1"/>
+            </a:solidFill>
+            <a:tailEnd type="arrow" w="lg" len="lg"/>
+          </a:ln>
+        </p:spPr>
+        <p:style>
+          <a:lnRef idx="2">
+            <a:schemeClr val="accent1"/>
+          </a:lnRef>
+          <a:fillRef idx="0">
+            <a:schemeClr val="accent1"/>
+          </a:fillRef>
+          <a:effectRef idx="1">
+            <a:schemeClr val="accent1"/>
+          </a:effectRef>
+          <a:fontRef idx="minor">
+            <a:schemeClr val="tx1"/>
+          </a:fontRef>
+        </p:style>
+      </p:cxnSp>
     </p:spTree>
     <p:extLst>
       <p:ext uri="{BB962C8B-B14F-4D97-AF65-F5344CB8AC3E}">
